--- a/presentation/SmoothGo_Presentation.pptx
+++ b/presentation/SmoothGo_Presentation.pptx
@@ -455,7 +455,7 @@
           <a:lstStyle xmlns:a="http://schemas.openxmlformats.org/drawingml/2006/main"/>
           <a:p xmlns:a="http://schemas.openxmlformats.org/drawingml/2006/main">
             <a:r>
-              <a:t>OPEN (Member B · 0:00–0:25)</a:t>
+              <a:t>OPEN (Member A · 0:00–0:25)</a:t>
             </a:r>
           </a:p>
           <a:p xmlns:a="http://schemas.openxmlformats.org/drawingml/2006/main">
@@ -540,7 +540,7 @@
           <a:lstStyle xmlns:a="http://schemas.openxmlformats.org/drawingml/2006/main"/>
           <a:p xmlns:a="http://schemas.openxmlformats.org/drawingml/2006/main">
             <a:r>
-              <a:t>MARKETING (Member E · 10:45–11:45)</a:t>
+              <a:t>MARKETING (Member D · 10:45–11:45)</a:t>
             </a:r>
           </a:p>
           <a:p xmlns:a="http://schemas.openxmlformats.org/drawingml/2006/main">
@@ -620,7 +620,7 @@
           <a:lstStyle xmlns:a="http://schemas.openxmlformats.org/drawingml/2006/main"/>
           <a:p xmlns:a="http://schemas.openxmlformats.org/drawingml/2006/main">
             <a:r>
-              <a:t>FINANCE (Member D · 11:45–12:45)</a:t>
+              <a:t>FINANCE (Member C · 11:45–12:45)</a:t>
             </a:r>
           </a:p>
           <a:p xmlns:a="http://schemas.openxmlformats.org/drawingml/2006/main">
@@ -705,7 +705,7 @@
           <a:lstStyle xmlns:a="http://schemas.openxmlformats.org/drawingml/2006/main"/>
           <a:p xmlns:a="http://schemas.openxmlformats.org/drawingml/2006/main">
             <a:r>
-              <a:t>RISKS (Member F · 12:45–13:45)</a:t>
+              <a:t>RISKS (Member E · 12:45–13:45)</a:t>
             </a:r>
           </a:p>
           <a:p xmlns:a="http://schemas.openxmlformats.org/drawingml/2006/main">
@@ -785,7 +785,7 @@
           <a:lstStyle xmlns:a="http://schemas.openxmlformats.org/drawingml/2006/main"/>
           <a:p xmlns:a="http://schemas.openxmlformats.org/drawingml/2006/main">
             <a:r>
-              <a:t>CONCLUSION (Member F · 13:45–15:00)</a:t>
+              <a:t>CONCLUSION (Member E · 13:45–15:00)</a:t>
             </a:r>
           </a:p>
           <a:p xmlns:a="http://schemas.openxmlformats.org/drawingml/2006/main">
@@ -870,7 +870,7 @@
           <a:lstStyle xmlns:a="http://schemas.openxmlformats.org/drawingml/2006/main"/>
           <a:p xmlns:a="http://schemas.openxmlformats.org/drawingml/2006/main">
             <a:r>
-              <a:t>REFERENCES</a:t>
+              <a:t>REFERENCES (Member B)</a:t>
             </a:r>
           </a:p>
           <a:p xmlns:a="http://schemas.openxmlformats.org/drawingml/2006/main">
@@ -955,7 +955,7 @@
           <a:lstStyle xmlns:a="http://schemas.openxmlformats.org/drawingml/2006/main"/>
           <a:p xmlns:a="http://schemas.openxmlformats.org/drawingml/2006/main">
             <a:r>
-              <a:t>PROBLEM (Member B / Member C · 0:25–1:45)</a:t>
+              <a:t>PROBLEM (Member A · 0:25–1:45)</a:t>
             </a:r>
           </a:p>
           <a:p xmlns:a="http://schemas.openxmlformats.org/drawingml/2006/main">
@@ -1040,7 +1040,7 @@
           <a:lstStyle xmlns:a="http://schemas.openxmlformats.org/drawingml/2006/main"/>
           <a:p xmlns:a="http://schemas.openxmlformats.org/drawingml/2006/main">
             <a:r>
-              <a:t>SOLUTION (Member C · 1:45–2:45)</a:t>
+              <a:t>SOLUTION (Member A · 1:45–2:45)</a:t>
             </a:r>
           </a:p>
           <a:p xmlns:a="http://schemas.openxmlformats.org/drawingml/2006/main">
@@ -1125,7 +1125,7 @@
           <a:lstStyle xmlns:a="http://schemas.openxmlformats.org/drawingml/2006/main"/>
           <a:p xmlns:a="http://schemas.openxmlformats.org/drawingml/2006/main">
             <a:r>
-              <a:t>CUSTOMERS (Member C · 2:45–3:45)</a:t>
+              <a:t>CUSTOMERS (Member B · 2:45–3:45)</a:t>
             </a:r>
           </a:p>
           <a:p xmlns:a="http://schemas.openxmlformats.org/drawingml/2006/main">
@@ -1205,7 +1205,7 @@
           <a:lstStyle xmlns:a="http://schemas.openxmlformats.org/drawingml/2006/main"/>
           <a:p xmlns:a="http://schemas.openxmlformats.org/drawingml/2006/main">
             <a:r>
-              <a:t>DEMO (Member A · 3:45–6:15)</a:t>
+              <a:t>DEMO (Member F · 3:45–6:15)</a:t>
             </a:r>
           </a:p>
           <a:p xmlns:a="http://schemas.openxmlformats.org/drawingml/2006/main">
@@ -1290,7 +1290,7 @@
           <a:lstStyle xmlns:a="http://schemas.openxmlformats.org/drawingml/2006/main"/>
           <a:p xmlns:a="http://schemas.openxmlformats.org/drawingml/2006/main">
             <a:r>
-              <a:t>HOW IT WORKS (Member A · 6:15–7:15)</a:t>
+              <a:t>HOW IT WORKS (Member F · 6:15–7:15)</a:t>
             </a:r>
           </a:p>
           <a:p xmlns:a="http://schemas.openxmlformats.org/drawingml/2006/main">
@@ -1306,6 +1306,11 @@
           <a:p xmlns:a="http://schemas.openxmlformats.org/drawingml/2006/main">
             <a:r>
               <a:t>Explainability matters: the user can see why a stop was recommended.</a:t>
+            </a:r>
+          </a:p>
+          <a:p xmlns:a="http://schemas.openxmlformats.org/drawingml/2006/main">
+            <a:r>
+              <a:t>If asked about accuracy: every queue estimate is a range with a stated confidence, not a single number.</a:t>
             </a:r>
           </a:p>
         </p:txBody>
@@ -1375,7 +1380,7 @@
           <a:lstStyle xmlns:a="http://schemas.openxmlformats.org/drawingml/2006/main"/>
           <a:p xmlns:a="http://schemas.openxmlformats.org/drawingml/2006/main">
             <a:r>
-              <a:t>MARKET (Member C · 7:15–8:15)</a:t>
+              <a:t>MARKET (Member B · 7:15–8:15)</a:t>
             </a:r>
           </a:p>
           <a:p xmlns:a="http://schemas.openxmlformats.org/drawingml/2006/main">
@@ -1455,7 +1460,7 @@
           <a:lstStyle xmlns:a="http://schemas.openxmlformats.org/drawingml/2006/main"/>
           <a:p xmlns:a="http://schemas.openxmlformats.org/drawingml/2006/main">
             <a:r>
-              <a:t>BUSINESS MODEL (Member D · 8:15–9:45)</a:t>
+              <a:t>BUSINESS MODEL (Member C · 8:15–9:45)</a:t>
             </a:r>
           </a:p>
           <a:p xmlns:a="http://schemas.openxmlformats.org/drawingml/2006/main">
@@ -1540,7 +1545,7 @@
           <a:lstStyle xmlns:a="http://schemas.openxmlformats.org/drawingml/2006/main"/>
           <a:p xmlns:a="http://schemas.openxmlformats.org/drawingml/2006/main">
             <a:r>
-              <a:t>OPERATIONS (Member E · 9:45–10:45)</a:t>
+              <a:t>OPERATIONS (Member D · 9:45–10:45)</a:t>
             </a:r>
           </a:p>
           <a:p xmlns:a="http://schemas.openxmlformats.org/drawingml/2006/main">
@@ -14672,6 +14677,10 @@
           <a:effectRef xmlns:a="http://schemas.openxmlformats.org/drawingml/2006/main" idx="4"/>
           <a:fontRef xmlns:a="http://schemas.openxmlformats.org/drawingml/2006/main" idx="major"/>
         </p:style>
+        <p:txBody xmlns:a="http://schemas.openxmlformats.org/drawingml/2006/main">
+          <a:bodyPr/>
+          <a:p/>
+        </p:txBody>
       </p:sp>
       <p:sp>
         <p:nvSpPr>
@@ -14829,6 +14838,10 @@
             <a:prstDash val="solid"/>
           </a:ln>
         </p:spPr>
+        <p:txBody xmlns:a="http://schemas.openxmlformats.org/drawingml/2006/main">
+          <a:bodyPr/>
+          <a:p/>
+        </p:txBody>
       </p:sp>
       <p:sp>
         <p:nvSpPr>
@@ -14986,6 +14999,10 @@
             <a:prstDash val="solid"/>
           </a:ln>
         </p:spPr>
+        <p:txBody xmlns:a="http://schemas.openxmlformats.org/drawingml/2006/main">
+          <a:bodyPr/>
+          <a:p/>
+        </p:txBody>
       </p:sp>
       <p:sp>
         <p:nvSpPr>
@@ -15205,6 +15222,10 @@
             <a:prstDash val="solid"/>
           </a:ln>
         </p:spPr>
+        <p:txBody xmlns:a="http://schemas.openxmlformats.org/drawingml/2006/main">
+          <a:bodyPr/>
+          <a:p/>
+        </p:txBody>
       </p:sp>
       <p:sp>
         <p:nvSpPr>
@@ -15424,6 +15445,10 @@
             <a:prstDash val="solid"/>
           </a:ln>
         </p:spPr>
+        <p:txBody xmlns:a="http://schemas.openxmlformats.org/drawingml/2006/main">
+          <a:bodyPr/>
+          <a:p/>
+        </p:txBody>
       </p:sp>
       <p:sp>
         <p:nvSpPr>
@@ -15643,6 +15668,10 @@
             <a:prstDash val="solid"/>
           </a:ln>
         </p:spPr>
+        <p:txBody xmlns:a="http://schemas.openxmlformats.org/drawingml/2006/main">
+          <a:bodyPr/>
+          <a:p/>
+        </p:txBody>
       </p:sp>
       <p:sp>
         <p:nvSpPr>
@@ -15738,6 +15767,10 @@
             <a:prstDash val="solid"/>
           </a:ln>
         </p:spPr>
+        <p:txBody xmlns:a="http://schemas.openxmlformats.org/drawingml/2006/main">
+          <a:bodyPr/>
+          <a:p/>
+        </p:txBody>
       </p:sp>
       <p:sp>
         <p:nvSpPr>
@@ -15957,6 +15990,10 @@
             <a:prstDash val="solid"/>
           </a:ln>
         </p:spPr>
+        <p:txBody xmlns:a="http://schemas.openxmlformats.org/drawingml/2006/main">
+          <a:bodyPr/>
+          <a:p/>
+        </p:txBody>
       </p:sp>
       <p:sp>
         <p:nvSpPr>
@@ -16176,6 +16213,10 @@
             <a:prstDash val="solid"/>
           </a:ln>
         </p:spPr>
+        <p:txBody xmlns:a="http://schemas.openxmlformats.org/drawingml/2006/main">
+          <a:bodyPr/>
+          <a:p/>
+        </p:txBody>
       </p:sp>
       <p:sp>
         <p:nvSpPr>
@@ -16395,6 +16436,10 @@
             <a:prstDash val="solid"/>
           </a:ln>
         </p:spPr>
+        <p:txBody xmlns:a="http://schemas.openxmlformats.org/drawingml/2006/main">
+          <a:bodyPr/>
+          <a:p/>
+        </p:txBody>
       </p:sp>
       <p:sp>
         <p:nvSpPr>
@@ -16614,6 +16659,10 @@
             <a:prstDash val="solid"/>
           </a:ln>
         </p:spPr>
+        <p:txBody xmlns:a="http://schemas.openxmlformats.org/drawingml/2006/main">
+          <a:bodyPr/>
+          <a:p/>
+        </p:txBody>
       </p:sp>
       <p:sp>
         <p:nvSpPr>
@@ -16831,6 +16880,10 @@
             <a:prstDash val="solid"/>
           </a:ln>
         </p:spPr>
+        <p:txBody xmlns:a="http://schemas.openxmlformats.org/drawingml/2006/main">
+          <a:bodyPr/>
+          <a:p/>
+        </p:txBody>
       </p:sp>
       <p:sp>
         <p:nvSpPr>
@@ -16889,7 +16942,7 @@
                 <a:ea typeface="Arial"/>
                 <a:cs typeface="Arial"/>
               </a:rPr>
-              <a:t>Live prototype · illustrative data · no real bookings</a:t>
+              <a:t>Live prototype · 574 places · illustrative data · no bookings</a:t>
             </a:r>
           </a:p>
         </p:txBody>
@@ -16924,6 +16977,10 @@
             <a:prstDash val="solid"/>
           </a:ln>
         </p:spPr>
+        <p:txBody xmlns:a="http://schemas.openxmlformats.org/drawingml/2006/main">
+          <a:bodyPr/>
+          <a:p/>
+        </p:txBody>
       </p:sp>
       <p:sp>
         <p:nvSpPr>
@@ -17236,6 +17293,10 @@
             <a:prstDash val="solid"/>
           </a:ln>
         </p:spPr>
+        <p:txBody xmlns:a="http://schemas.openxmlformats.org/drawingml/2006/main">
+          <a:bodyPr/>
+          <a:p/>
+        </p:txBody>
       </p:sp>
       <p:sp>
         <p:nvSpPr>
@@ -17457,6 +17518,10 @@
             <a:prstDash val="solid"/>
           </a:ln>
         </p:spPr>
+        <p:txBody xmlns:a="http://schemas.openxmlformats.org/drawingml/2006/main">
+          <a:bodyPr/>
+          <a:p/>
+        </p:txBody>
       </p:sp>
       <p:sp>
         <p:nvSpPr>
@@ -17678,6 +17743,10 @@
             <a:prstDash val="solid"/>
           </a:ln>
         </p:spPr>
+        <p:txBody xmlns:a="http://schemas.openxmlformats.org/drawingml/2006/main">
+          <a:bodyPr/>
+          <a:p/>
+        </p:txBody>
       </p:sp>
       <p:sp>
         <p:nvSpPr>
@@ -17860,7 +17929,7 @@
                 <a:ea typeface="Arial"/>
                 <a:cs typeface="Arial"/>
               </a:rPr>
-              <a:t>How long will you actually wait?</a:t>
+              <a:t>A range, with a stated confidence.</a:t>
             </a:r>
           </a:p>
         </p:txBody>
@@ -17899,6 +17968,10 @@
             <a:prstDash val="solid"/>
           </a:ln>
         </p:spPr>
+        <p:txBody xmlns:a="http://schemas.openxmlformats.org/drawingml/2006/main">
+          <a:bodyPr/>
+          <a:p/>
+        </p:txBody>
       </p:sp>
       <p:sp>
         <p:nvSpPr>
@@ -18120,6 +18193,10 @@
             <a:prstDash val="solid"/>
           </a:ln>
         </p:spPr>
+        <p:txBody xmlns:a="http://schemas.openxmlformats.org/drawingml/2006/main">
+          <a:bodyPr/>
+          <a:p/>
+        </p:txBody>
       </p:sp>
       <p:sp>
         <p:nvSpPr>
@@ -18341,6 +18418,10 @@
             <a:prstDash val="solid"/>
           </a:ln>
         </p:spPr>
+        <p:txBody xmlns:a="http://schemas.openxmlformats.org/drawingml/2006/main">
+          <a:bodyPr/>
+          <a:p/>
+        </p:txBody>
       </p:sp>
       <p:sp>
         <p:nvSpPr>
@@ -18562,6 +18643,10 @@
             <a:prstDash val="solid"/>
           </a:ln>
         </p:spPr>
+        <p:txBody xmlns:a="http://schemas.openxmlformats.org/drawingml/2006/main">
+          <a:bodyPr/>
+          <a:p/>
+        </p:txBody>
       </p:sp>
       <p:sp>
         <p:nvSpPr>
@@ -18717,6 +18802,10 @@
             <a:prstDash val="solid"/>
           </a:ln>
         </p:spPr>
+        <p:txBody xmlns:a="http://schemas.openxmlformats.org/drawingml/2006/main">
+          <a:bodyPr/>
+          <a:p/>
+        </p:txBody>
       </p:sp>
       <p:sp>
         <p:nvSpPr>
@@ -18810,6 +18899,10 @@
             <a:prstDash val="solid"/>
           </a:ln>
         </p:spPr>
+        <p:txBody xmlns:a="http://schemas.openxmlformats.org/drawingml/2006/main">
+          <a:bodyPr/>
+          <a:p/>
+        </p:txBody>
       </p:sp>
       <p:sp>
         <p:nvSpPr>

--- a/presentation/SmoothGo_Presentation.pptx
+++ b/presentation/SmoothGo_Presentation.pptx
@@ -22,6 +22,7 @@
     <p:sldId xmlns:r="http://schemas.openxmlformats.org/officeDocument/2006/relationships" id="267" r:id="R0ca4eabb2c2e4f02"/>
     <p:sldId xmlns:r="http://schemas.openxmlformats.org/officeDocument/2006/relationships" id="268" r:id="R334e5c44e1bb4344"/>
     <p:sldId xmlns:r="http://schemas.openxmlformats.org/officeDocument/2006/relationships" id="269" r:id="R8a73108fe74a4a67"/>
+    <p:sldId xmlns:ns0="http://schemas.openxmlformats.org/officeDocument/2006/relationships" id="270" ns0:id="rId20"/>
   </p:sldIdLst>
   <p:sldSz cx="12192000" cy="6858000"/>
   <p:notesSz cx="6858000" cy="9144000"/>
@@ -911,6 +912,98 @@
   </p:cSld>
   <p:clrMapOvr>
     <a:masterClrMapping xmlns:a="http://schemas.openxmlformats.org/drawingml/2006/main"/>
+  </p:clrMapOvr>
+</p:notes>
+</file>
+
+<file path=ppt/notesSlides/notesSlide15.xml><?xml version="1.0" encoding="utf-8"?>
+<p:notes xmlns:a="http://schemas.openxmlformats.org/drawingml/2006/main" xmlns:p="http://schemas.openxmlformats.org/presentationml/2006/main" xmlns:r="http://schemas.openxmlformats.org/officeDocument/2006/relationships">
+  <p:cSld>
+    <p:spTree>
+      <p:nvGrpSpPr>
+        <p:cNvPr id="1" name=""/>
+        <p:cNvGrpSpPr/>
+        <p:nvPr/>
+      </p:nvGrpSpPr>
+      <p:grpSpPr>
+        <a:xfrm>
+          <a:off x="0" y="0"/>
+          <a:ext cx="0" cy="0"/>
+          <a:chOff x="0" y="0"/>
+          <a:chExt cx="0" cy="0"/>
+        </a:xfrm>
+      </p:grpSpPr>
+      <p:sp>
+        <p:nvSpPr>
+          <p:cNvPr id="2" name="Slide Image Placeholder 1"/>
+          <p:cNvSpPr>
+            <a:spLocks noGrp="1"/>
+          </p:cNvSpPr>
+          <p:nvPr>
+            <p:ph type="sldImg" idx="2"/>
+          </p:nvPr>
+        </p:nvSpPr>
+        <p:spPr/>
+      </p:sp>
+      <p:sp>
+        <p:nvSpPr>
+          <p:cNvPr id="3" name="Notes Placeholder 2"/>
+          <p:cNvSpPr>
+            <a:spLocks noGrp="1"/>
+          </p:cNvSpPr>
+          <p:nvPr>
+            <p:ph type="body" idx="3" sz="quarter"/>
+          </p:nvPr>
+        </p:nvSpPr>
+        <p:spPr/>
+        <p:txBody>
+          <a:bodyPr/>
+          <a:lstStyle/>
+          <a:p>
+            <a:r>
+              <a:t>CLOSING · LEAVE UP FOR Q&amp;A (Member F · after 15:00)</a:t>
+            </a:r>
+          </a:p>
+          <a:p/>
+          <a:p>
+            <a:r>
+              <a:t>Do not talk over this slide -- it is a hand-off, not a beat.</a:t>
+            </a:r>
+          </a:p>
+          <a:p>
+            <a:r>
+              <a:t>Say: "One link, no install. It works on your phone right now."</a:t>
+            </a:r>
+          </a:p>
+          <a:p>
+            <a:r>
+              <a:t>Then leave it on screen for the whole Q&amp;A so people can scan at their</a:t>
+            </a:r>
+          </a:p>
+          <a:p>
+            <a:r>
+              <a:t>own pace. If the wifi dies, the screenshot pages 5-6 still carry the demo.</a:t>
+            </a:r>
+          </a:p>
+          <a:p/>
+        </p:txBody>
+      </p:sp>
+      <p:sp>
+        <p:nvSpPr>
+          <p:cNvPr id="4" name="Slide Number Placeholder 3"/>
+          <p:cNvSpPr>
+            <a:spLocks noGrp="1"/>
+          </p:cNvSpPr>
+          <p:nvPr>
+            <p:ph type="sldNum" idx="5" sz="quarter"/>
+          </p:nvPr>
+        </p:nvSpPr>
+        <p:spPr/>
+      </p:sp>
+    </p:spTree>
+  </p:cSld>
+  <p:clrMapOvr>
+    <a:masterClrMapping/>
   </p:clrMapOvr>
 </p:notes>
 </file>
@@ -10041,6 +10134,48 @@
 </p:sld>
 </file>
 
+<file path=ppt/slides/slide15.xml><?xml version="1.0" encoding="utf-8"?>
+<p:sld xmlns:a="http://schemas.openxmlformats.org/drawingml/2006/main" xmlns:p="http://schemas.openxmlformats.org/presentationml/2006/main" xmlns:r="http://schemas.openxmlformats.org/officeDocument/2006/relationships">
+  <p:cSld>
+    <p:spTree>
+      <p:nvGrpSpPr>
+        <p:cNvPr id="1" name=""/>
+        <p:cNvGrpSpPr/>
+        <p:nvPr/>
+      </p:nvGrpSpPr>
+      <p:grpSpPr/>
+      <p:pic>
+        <p:nvPicPr>
+          <p:cNvPr id="2" name="Picture 1" descr="scan-card.png"/>
+          <p:cNvPicPr>
+            <a:picLocks noChangeAspect="1"/>
+          </p:cNvPicPr>
+          <p:nvPr/>
+        </p:nvPicPr>
+        <p:blipFill>
+          <a:blip r:embed="rId2"/>
+          <a:stretch>
+            <a:fillRect/>
+          </a:stretch>
+        </p:blipFill>
+        <p:spPr>
+          <a:xfrm>
+            <a:off x="0" y="0"/>
+            <a:ext cx="12192000" cy="6858000"/>
+          </a:xfrm>
+          <a:prstGeom prst="rect">
+            <a:avLst/>
+          </a:prstGeom>
+        </p:spPr>
+      </p:pic>
+    </p:spTree>
+  </p:cSld>
+  <p:clrMapOvr>
+    <a:masterClrMapping/>
+  </p:clrMapOvr>
+</p:sld>
+</file>
+
 <file path=ppt/slides/slide2.xml><?xml version="1.0" encoding="utf-8"?>
 <p:sld xmlns:p="http://schemas.openxmlformats.org/presentationml/2006/main">
   <p:cSld>
